--- a/Documentation/Figures/Consistent_Hashing.pptx
+++ b/Documentation/Figures/Consistent_Hashing.pptx
@@ -6,6 +6,8 @@
   </p:sldMasterIdLst>
   <p:sldIdLst>
     <p:sldId id="257" r:id="rId2"/>
+    <p:sldId id="258" r:id="rId3"/>
+    <p:sldId id="259" r:id="rId4"/>
   </p:sldIdLst>
   <p:sldSz cx="12192000" cy="6858000"/>
   <p:notesSz cx="6858000" cy="9144000"/>
@@ -104,6 +106,11 @@
       </a:defRPr>
     </a:lvl9pPr>
   </p:defaultTextStyle>
+  <p:extLst>
+    <p:ext uri="{EFAFB233-063F-42B5-8137-9DF3F51BA10A}">
+      <p15:sldGuideLst xmlns:p15="http://schemas.microsoft.com/office/powerpoint/2012/main"/>
+    </p:ext>
+  </p:extLst>
 </p:presentation>
 </file>
 
@@ -254,7 +261,7 @@
           <a:p>
             <a:fld id="{F7A23452-6CA4-4ED6-9F3F-F00F21910B44}" type="datetimeFigureOut">
               <a:rPr lang="en-US" smtClean="0"/>
-              <a:t>4/1/2023</a:t>
+              <a:t>4/26/2023</a:t>
             </a:fld>
             <a:endParaRPr lang="en-US"/>
           </a:p>
@@ -452,7 +459,7 @@
           <a:p>
             <a:fld id="{F7A23452-6CA4-4ED6-9F3F-F00F21910B44}" type="datetimeFigureOut">
               <a:rPr lang="en-US" smtClean="0"/>
-              <a:t>4/1/2023</a:t>
+              <a:t>4/26/2023</a:t>
             </a:fld>
             <a:endParaRPr lang="en-US"/>
           </a:p>
@@ -660,7 +667,7 @@
           <a:p>
             <a:fld id="{F7A23452-6CA4-4ED6-9F3F-F00F21910B44}" type="datetimeFigureOut">
               <a:rPr lang="en-US" smtClean="0"/>
-              <a:t>4/1/2023</a:t>
+              <a:t>4/26/2023</a:t>
             </a:fld>
             <a:endParaRPr lang="en-US"/>
           </a:p>
@@ -858,7 +865,7 @@
           <a:p>
             <a:fld id="{F7A23452-6CA4-4ED6-9F3F-F00F21910B44}" type="datetimeFigureOut">
               <a:rPr lang="en-US" smtClean="0"/>
-              <a:t>4/1/2023</a:t>
+              <a:t>4/26/2023</a:t>
             </a:fld>
             <a:endParaRPr lang="en-US"/>
           </a:p>
@@ -1133,7 +1140,7 @@
           <a:p>
             <a:fld id="{F7A23452-6CA4-4ED6-9F3F-F00F21910B44}" type="datetimeFigureOut">
               <a:rPr lang="en-US" smtClean="0"/>
-              <a:t>4/1/2023</a:t>
+              <a:t>4/26/2023</a:t>
             </a:fld>
             <a:endParaRPr lang="en-US"/>
           </a:p>
@@ -1398,7 +1405,7 @@
           <a:p>
             <a:fld id="{F7A23452-6CA4-4ED6-9F3F-F00F21910B44}" type="datetimeFigureOut">
               <a:rPr lang="en-US" smtClean="0"/>
-              <a:t>4/1/2023</a:t>
+              <a:t>4/26/2023</a:t>
             </a:fld>
             <a:endParaRPr lang="en-US"/>
           </a:p>
@@ -1810,7 +1817,7 @@
           <a:p>
             <a:fld id="{F7A23452-6CA4-4ED6-9F3F-F00F21910B44}" type="datetimeFigureOut">
               <a:rPr lang="en-US" smtClean="0"/>
-              <a:t>4/1/2023</a:t>
+              <a:t>4/26/2023</a:t>
             </a:fld>
             <a:endParaRPr lang="en-US"/>
           </a:p>
@@ -1951,7 +1958,7 @@
           <a:p>
             <a:fld id="{F7A23452-6CA4-4ED6-9F3F-F00F21910B44}" type="datetimeFigureOut">
               <a:rPr lang="en-US" smtClean="0"/>
-              <a:t>4/1/2023</a:t>
+              <a:t>4/26/2023</a:t>
             </a:fld>
             <a:endParaRPr lang="en-US"/>
           </a:p>
@@ -2064,7 +2071,7 @@
           <a:p>
             <a:fld id="{F7A23452-6CA4-4ED6-9F3F-F00F21910B44}" type="datetimeFigureOut">
               <a:rPr lang="en-US" smtClean="0"/>
-              <a:t>4/1/2023</a:t>
+              <a:t>4/26/2023</a:t>
             </a:fld>
             <a:endParaRPr lang="en-US"/>
           </a:p>
@@ -2375,7 +2382,7 @@
           <a:p>
             <a:fld id="{F7A23452-6CA4-4ED6-9F3F-F00F21910B44}" type="datetimeFigureOut">
               <a:rPr lang="en-US" smtClean="0"/>
-              <a:t>4/1/2023</a:t>
+              <a:t>4/26/2023</a:t>
             </a:fld>
             <a:endParaRPr lang="en-US"/>
           </a:p>
@@ -2663,7 +2670,7 @@
           <a:p>
             <a:fld id="{F7A23452-6CA4-4ED6-9F3F-F00F21910B44}" type="datetimeFigureOut">
               <a:rPr lang="en-US" smtClean="0"/>
-              <a:t>4/1/2023</a:t>
+              <a:t>4/26/2023</a:t>
             </a:fld>
             <a:endParaRPr lang="en-US"/>
           </a:p>
@@ -2904,7 +2911,7 @@
           <a:p>
             <a:fld id="{F7A23452-6CA4-4ED6-9F3F-F00F21910B44}" type="datetimeFigureOut">
               <a:rPr lang="en-US" smtClean="0"/>
-              <a:t>4/1/2023</a:t>
+              <a:t>4/26/2023</a:t>
             </a:fld>
             <a:endParaRPr lang="en-US"/>
           </a:p>
@@ -4876,6 +4883,1811 @@
 </p:sld>
 </file>
 
+<file path=ppt/slides/slide2.xml><?xml version="1.0" encoding="utf-8"?>
+<p:sld xmlns:a="http://schemas.openxmlformats.org/drawingml/2006/main" xmlns:r="http://schemas.openxmlformats.org/officeDocument/2006/relationships" xmlns:p="http://schemas.openxmlformats.org/presentationml/2006/main">
+  <p:cSld>
+    <p:spTree>
+      <p:nvGrpSpPr>
+        <p:cNvPr id="1" name=""/>
+        <p:cNvGrpSpPr/>
+        <p:nvPr/>
+      </p:nvGrpSpPr>
+      <p:grpSpPr>
+        <a:xfrm>
+          <a:off x="0" y="0"/>
+          <a:ext cx="0" cy="0"/>
+          <a:chOff x="0" y="0"/>
+          <a:chExt cx="0" cy="0"/>
+        </a:xfrm>
+      </p:grpSpPr>
+      <p:grpSp>
+        <p:nvGrpSpPr>
+          <p:cNvPr id="35" name="Group 34">
+            <a:extLst>
+              <a:ext uri="{FF2B5EF4-FFF2-40B4-BE49-F238E27FC236}">
+                <a16:creationId xmlns:a16="http://schemas.microsoft.com/office/drawing/2014/main" id="{FB59A739-E713-623F-E2D0-520E3C404037}"/>
+              </a:ext>
+            </a:extLst>
+          </p:cNvPr>
+          <p:cNvGrpSpPr/>
+          <p:nvPr/>
+        </p:nvGrpSpPr>
+        <p:grpSpPr>
+          <a:xfrm>
+            <a:off x="2893926" y="203002"/>
+            <a:ext cx="6392117" cy="6403869"/>
+            <a:chOff x="2893926" y="227065"/>
+            <a:chExt cx="6392117" cy="6403869"/>
+          </a:xfrm>
+        </p:grpSpPr>
+        <p:grpSp>
+          <p:nvGrpSpPr>
+            <p:cNvPr id="33" name="Group 32">
+              <a:extLst>
+                <a:ext uri="{FF2B5EF4-FFF2-40B4-BE49-F238E27FC236}">
+                  <a16:creationId xmlns:a16="http://schemas.microsoft.com/office/drawing/2014/main" id="{4A6E237F-3A5D-DE9E-5F0B-8AD46018C3BC}"/>
+                </a:ext>
+              </a:extLst>
+            </p:cNvPr>
+            <p:cNvGrpSpPr/>
+            <p:nvPr/>
+          </p:nvGrpSpPr>
+          <p:grpSpPr>
+            <a:xfrm>
+              <a:off x="2893926" y="227065"/>
+              <a:ext cx="6392117" cy="6403869"/>
+              <a:chOff x="335340" y="1109854"/>
+              <a:chExt cx="3449532" cy="3455874"/>
+            </a:xfrm>
+          </p:grpSpPr>
+          <p:grpSp>
+            <p:nvGrpSpPr>
+              <p:cNvPr id="19" name="Google Shape;2586;p99">
+                <a:extLst>
+                  <a:ext uri="{FF2B5EF4-FFF2-40B4-BE49-F238E27FC236}">
+                    <a16:creationId xmlns:a16="http://schemas.microsoft.com/office/drawing/2014/main" id="{D77630F0-0D49-61A4-0EB9-543084D11F49}"/>
+                  </a:ext>
+                </a:extLst>
+              </p:cNvPr>
+              <p:cNvGrpSpPr/>
+              <p:nvPr/>
+            </p:nvGrpSpPr>
+            <p:grpSpPr>
+              <a:xfrm>
+                <a:off x="335340" y="1109854"/>
+                <a:ext cx="3449532" cy="3455874"/>
+                <a:chOff x="3334516" y="2410051"/>
+                <a:chExt cx="3910591" cy="3872996"/>
+              </a:xfrm>
+            </p:grpSpPr>
+            <p:sp>
+              <p:nvSpPr>
+                <p:cNvPr id="20" name="Google Shape;2587;p99">
+                  <a:extLst>
+                    <a:ext uri="{FF2B5EF4-FFF2-40B4-BE49-F238E27FC236}">
+                      <a16:creationId xmlns:a16="http://schemas.microsoft.com/office/drawing/2014/main" id="{2CC13199-0502-5977-48FD-3F3822CAC330}"/>
+                    </a:ext>
+                  </a:extLst>
+                </p:cNvPr>
+                <p:cNvSpPr/>
+                <p:nvPr/>
+              </p:nvSpPr>
+              <p:spPr>
+                <a:xfrm>
+                  <a:off x="5292203" y="3380321"/>
+                  <a:ext cx="1952904" cy="1932455"/>
+                </a:xfrm>
+                <a:custGeom>
+                  <a:avLst/>
+                  <a:gdLst/>
+                  <a:ahLst/>
+                  <a:cxnLst/>
+                  <a:rect l="l" t="t" r="r" b="b"/>
+                  <a:pathLst>
+                    <a:path w="174" h="173" extrusionOk="0">
+                      <a:moveTo>
+                        <a:pt x="150" y="173"/>
+                      </a:moveTo>
+                      <a:cubicBezTo>
+                        <a:pt x="165" y="147"/>
+                        <a:pt x="174" y="117"/>
+                        <a:pt x="174" y="87"/>
+                      </a:cubicBezTo>
+                      <a:cubicBezTo>
+                        <a:pt x="174" y="56"/>
+                        <a:pt x="165" y="26"/>
+                        <a:pt x="150" y="0"/>
+                      </a:cubicBezTo>
+                      <a:lnTo>
+                        <a:pt x="0" y="87"/>
+                      </a:lnTo>
+                      <a:lnTo>
+                        <a:pt x="150" y="173"/>
+                      </a:lnTo>
+                      <a:close/>
+                    </a:path>
+                  </a:pathLst>
+                </a:custGeom>
+                <a:solidFill>
+                  <a:schemeClr val="bg1"/>
+                </a:solidFill>
+                <a:ln w="28575" cap="flat" cmpd="sng">
+                  <a:solidFill>
+                    <a:schemeClr val="tx1"/>
+                  </a:solidFill>
+                  <a:prstDash val="solid"/>
+                  <a:round/>
+                  <a:headEnd type="none" w="sm" len="sm"/>
+                  <a:tailEnd type="none" w="sm" len="sm"/>
+                </a:ln>
+              </p:spPr>
+              <p:txBody>
+                <a:bodyPr spcFirstLastPara="1" wrap="square" lIns="68575" tIns="34275" rIns="68575" bIns="34275" anchor="ctr" anchorCtr="0">
+                  <a:noAutofit/>
+                </a:bodyPr>
+                <a:lstStyle/>
+                <a:p>
+                  <a:pPr marL="0" marR="0" lvl="0" indent="0" algn="l" rtl="0">
+                    <a:lnSpc>
+                      <a:spcPct val="100000"/>
+                    </a:lnSpc>
+                    <a:spcBef>
+                      <a:spcPts val="0"/>
+                    </a:spcBef>
+                    <a:spcAft>
+                      <a:spcPts val="0"/>
+                    </a:spcAft>
+                    <a:buClr>
+                      <a:srgbClr val="000000"/>
+                    </a:buClr>
+                    <a:buSzPts val="900"/>
+                    <a:buFont typeface="Arial"/>
+                    <a:buNone/>
+                  </a:pPr>
+                  <a:endParaRPr sz="900" b="0" i="0" u="none" strike="noStrike" cap="none">
+                    <a:solidFill>
+                      <a:schemeClr val="lt2"/>
+                    </a:solidFill>
+                    <a:latin typeface="Arial"/>
+                    <a:ea typeface="Arial"/>
+                    <a:cs typeface="Arial"/>
+                    <a:sym typeface="Arial"/>
+                  </a:endParaRPr>
+                </a:p>
+              </p:txBody>
+            </p:sp>
+            <p:sp>
+              <p:nvSpPr>
+                <p:cNvPr id="21" name="Google Shape;2588;p99">
+                  <a:extLst>
+                    <a:ext uri="{FF2B5EF4-FFF2-40B4-BE49-F238E27FC236}">
+                      <a16:creationId xmlns:a16="http://schemas.microsoft.com/office/drawing/2014/main" id="{570B0646-4BE4-DFE3-E468-08431DFBC407}"/>
+                    </a:ext>
+                  </a:extLst>
+                </p:cNvPr>
+                <p:cNvSpPr/>
+                <p:nvPr/>
+              </p:nvSpPr>
+              <p:spPr>
+                <a:xfrm>
+                  <a:off x="5295883" y="2410051"/>
+                  <a:ext cx="1683748" cy="1942562"/>
+                </a:xfrm>
+                <a:custGeom>
+                  <a:avLst/>
+                  <a:gdLst/>
+                  <a:ahLst/>
+                  <a:cxnLst/>
+                  <a:rect l="l" t="t" r="r" b="b"/>
+                  <a:pathLst>
+                    <a:path w="150" h="174" extrusionOk="0">
+                      <a:moveTo>
+                        <a:pt x="150" y="87"/>
+                      </a:moveTo>
+                      <a:cubicBezTo>
+                        <a:pt x="119" y="33"/>
+                        <a:pt x="62" y="0"/>
+                        <a:pt x="0" y="0"/>
+                      </a:cubicBezTo>
+                      <a:lnTo>
+                        <a:pt x="0" y="174"/>
+                      </a:lnTo>
+                      <a:lnTo>
+                        <a:pt x="150" y="87"/>
+                      </a:lnTo>
+                      <a:close/>
+                    </a:path>
+                  </a:pathLst>
+                </a:custGeom>
+                <a:solidFill>
+                  <a:schemeClr val="bg1"/>
+                </a:solidFill>
+                <a:ln w="28575" cap="flat" cmpd="sng">
+                  <a:solidFill>
+                    <a:schemeClr val="tx1"/>
+                  </a:solidFill>
+                  <a:prstDash val="solid"/>
+                  <a:round/>
+                  <a:headEnd type="none" w="sm" len="sm"/>
+                  <a:tailEnd type="none" w="sm" len="sm"/>
+                </a:ln>
+              </p:spPr>
+              <p:txBody>
+                <a:bodyPr spcFirstLastPara="1" wrap="square" lIns="68575" tIns="34275" rIns="68575" bIns="34275" anchor="ctr" anchorCtr="0">
+                  <a:noAutofit/>
+                </a:bodyPr>
+                <a:lstStyle/>
+                <a:p>
+                  <a:pPr marL="0" marR="0" lvl="0" indent="0" algn="l" rtl="0">
+                    <a:lnSpc>
+                      <a:spcPct val="100000"/>
+                    </a:lnSpc>
+                    <a:spcBef>
+                      <a:spcPts val="0"/>
+                    </a:spcBef>
+                    <a:spcAft>
+                      <a:spcPts val="0"/>
+                    </a:spcAft>
+                    <a:buClr>
+                      <a:srgbClr val="000000"/>
+                    </a:buClr>
+                    <a:buSzPts val="900"/>
+                    <a:buFont typeface="Arial"/>
+                    <a:buNone/>
+                  </a:pPr>
+                  <a:endParaRPr sz="900" b="0" i="0" u="none" strike="noStrike" cap="none" dirty="0">
+                    <a:solidFill>
+                      <a:schemeClr val="lt2"/>
+                    </a:solidFill>
+                    <a:ea typeface="Arial"/>
+                    <a:cs typeface="Arial"/>
+                    <a:sym typeface="Arial"/>
+                  </a:endParaRPr>
+                </a:p>
+              </p:txBody>
+            </p:sp>
+            <p:sp>
+              <p:nvSpPr>
+                <p:cNvPr id="22" name="Google Shape;2589;p99">
+                  <a:extLst>
+                    <a:ext uri="{FF2B5EF4-FFF2-40B4-BE49-F238E27FC236}">
+                      <a16:creationId xmlns:a16="http://schemas.microsoft.com/office/drawing/2014/main" id="{E4CEC4C7-F9F9-836F-3D1E-989CC13D3AF8}"/>
+                    </a:ext>
+                  </a:extLst>
+                </p:cNvPr>
+                <p:cNvSpPr/>
+                <p:nvPr/>
+              </p:nvSpPr>
+              <p:spPr>
+                <a:xfrm>
+                  <a:off x="5299563" y="4352613"/>
+                  <a:ext cx="1683748" cy="1930434"/>
+                </a:xfrm>
+                <a:custGeom>
+                  <a:avLst/>
+                  <a:gdLst/>
+                  <a:ahLst/>
+                  <a:cxnLst/>
+                  <a:rect l="l" t="t" r="r" b="b"/>
+                  <a:pathLst>
+                    <a:path w="150" h="173" extrusionOk="0">
+                      <a:moveTo>
+                        <a:pt x="0" y="173"/>
+                      </a:moveTo>
+                      <a:cubicBezTo>
+                        <a:pt x="62" y="173"/>
+                        <a:pt x="119" y="140"/>
+                        <a:pt x="150" y="86"/>
+                      </a:cubicBezTo>
+                      <a:lnTo>
+                        <a:pt x="0" y="0"/>
+                      </a:lnTo>
+                      <a:lnTo>
+                        <a:pt x="0" y="173"/>
+                      </a:lnTo>
+                      <a:close/>
+                    </a:path>
+                  </a:pathLst>
+                </a:custGeom>
+                <a:solidFill>
+                  <a:schemeClr val="bg1"/>
+                </a:solidFill>
+                <a:ln w="28575" cap="flat" cmpd="sng">
+                  <a:solidFill>
+                    <a:schemeClr val="tx1"/>
+                  </a:solidFill>
+                  <a:prstDash val="solid"/>
+                  <a:round/>
+                  <a:headEnd type="none" w="sm" len="sm"/>
+                  <a:tailEnd type="none" w="sm" len="sm"/>
+                </a:ln>
+              </p:spPr>
+              <p:txBody>
+                <a:bodyPr spcFirstLastPara="1" wrap="square" lIns="68575" tIns="34275" rIns="68575" bIns="34275" anchor="ctr" anchorCtr="0">
+                  <a:noAutofit/>
+                </a:bodyPr>
+                <a:lstStyle/>
+                <a:p>
+                  <a:pPr marL="0" marR="0" lvl="0" indent="0" algn="l" rtl="0">
+                    <a:lnSpc>
+                      <a:spcPct val="100000"/>
+                    </a:lnSpc>
+                    <a:spcBef>
+                      <a:spcPts val="0"/>
+                    </a:spcBef>
+                    <a:spcAft>
+                      <a:spcPts val="0"/>
+                    </a:spcAft>
+                    <a:buClr>
+                      <a:srgbClr val="000000"/>
+                    </a:buClr>
+                    <a:buSzPts val="900"/>
+                    <a:buFont typeface="Arial"/>
+                    <a:buNone/>
+                  </a:pPr>
+                  <a:endParaRPr sz="900" b="0" i="0" u="none" strike="noStrike" cap="none">
+                    <a:solidFill>
+                      <a:schemeClr val="lt2"/>
+                    </a:solidFill>
+                    <a:latin typeface="Arial"/>
+                    <a:ea typeface="Arial"/>
+                    <a:cs typeface="Arial"/>
+                    <a:sym typeface="Arial"/>
+                  </a:endParaRPr>
+                </a:p>
+              </p:txBody>
+            </p:sp>
+            <p:sp>
+              <p:nvSpPr>
+                <p:cNvPr id="23" name="Google Shape;2590;p99">
+                  <a:extLst>
+                    <a:ext uri="{FF2B5EF4-FFF2-40B4-BE49-F238E27FC236}">
+                      <a16:creationId xmlns:a16="http://schemas.microsoft.com/office/drawing/2014/main" id="{06022CC7-3145-90D8-BC8B-5F6D7AA6C5DA}"/>
+                    </a:ext>
+                  </a:extLst>
+                </p:cNvPr>
+                <p:cNvSpPr/>
+                <p:nvPr/>
+              </p:nvSpPr>
+              <p:spPr>
+                <a:xfrm>
+                  <a:off x="3603673" y="4352613"/>
+                  <a:ext cx="1695890" cy="1930434"/>
+                </a:xfrm>
+                <a:custGeom>
+                  <a:avLst/>
+                  <a:gdLst/>
+                  <a:ahLst/>
+                  <a:cxnLst/>
+                  <a:rect l="l" t="t" r="r" b="b"/>
+                  <a:pathLst>
+                    <a:path w="151" h="173" extrusionOk="0">
+                      <a:moveTo>
+                        <a:pt x="0" y="86"/>
+                      </a:moveTo>
+                      <a:cubicBezTo>
+                        <a:pt x="31" y="140"/>
+                        <a:pt x="88" y="173"/>
+                        <a:pt x="151" y="173"/>
+                      </a:cubicBezTo>
+                      <a:lnTo>
+                        <a:pt x="151" y="0"/>
+                      </a:lnTo>
+                      <a:lnTo>
+                        <a:pt x="0" y="86"/>
+                      </a:lnTo>
+                      <a:close/>
+                    </a:path>
+                  </a:pathLst>
+                </a:custGeom>
+                <a:solidFill>
+                  <a:schemeClr val="bg1"/>
+                </a:solidFill>
+                <a:ln w="28575" cap="flat" cmpd="sng">
+                  <a:solidFill>
+                    <a:schemeClr val="tx1"/>
+                  </a:solidFill>
+                  <a:prstDash val="solid"/>
+                  <a:round/>
+                  <a:headEnd type="none" w="sm" len="sm"/>
+                  <a:tailEnd type="none" w="sm" len="sm"/>
+                </a:ln>
+              </p:spPr>
+              <p:txBody>
+                <a:bodyPr spcFirstLastPara="1" wrap="square" lIns="68575" tIns="34275" rIns="68575" bIns="34275" anchor="ctr" anchorCtr="0">
+                  <a:noAutofit/>
+                </a:bodyPr>
+                <a:lstStyle/>
+                <a:p>
+                  <a:pPr marL="0" marR="0" lvl="0" indent="0" algn="l" rtl="0">
+                    <a:lnSpc>
+                      <a:spcPct val="100000"/>
+                    </a:lnSpc>
+                    <a:spcBef>
+                      <a:spcPts val="0"/>
+                    </a:spcBef>
+                    <a:spcAft>
+                      <a:spcPts val="0"/>
+                    </a:spcAft>
+                    <a:buClr>
+                      <a:srgbClr val="000000"/>
+                    </a:buClr>
+                    <a:buSzPts val="900"/>
+                    <a:buFont typeface="Arial"/>
+                    <a:buNone/>
+                  </a:pPr>
+                  <a:endParaRPr sz="900" b="0" i="0" u="none" strike="noStrike" cap="none">
+                    <a:solidFill>
+                      <a:schemeClr val="lt2"/>
+                    </a:solidFill>
+                    <a:latin typeface="Arial"/>
+                    <a:ea typeface="Arial"/>
+                    <a:cs typeface="Arial"/>
+                    <a:sym typeface="Arial"/>
+                  </a:endParaRPr>
+                </a:p>
+              </p:txBody>
+            </p:sp>
+            <p:sp>
+              <p:nvSpPr>
+                <p:cNvPr id="24" name="Google Shape;2591;p99">
+                  <a:extLst>
+                    <a:ext uri="{FF2B5EF4-FFF2-40B4-BE49-F238E27FC236}">
+                      <a16:creationId xmlns:a16="http://schemas.microsoft.com/office/drawing/2014/main" id="{D866705D-C074-126F-FB17-9C3DE4380732}"/>
+                    </a:ext>
+                  </a:extLst>
+                </p:cNvPr>
+                <p:cNvSpPr/>
+                <p:nvPr/>
+              </p:nvSpPr>
+              <p:spPr>
+                <a:xfrm>
+                  <a:off x="3334516" y="3380321"/>
+                  <a:ext cx="1965047" cy="1932455"/>
+                </a:xfrm>
+                <a:custGeom>
+                  <a:avLst/>
+                  <a:gdLst/>
+                  <a:ahLst/>
+                  <a:cxnLst/>
+                  <a:rect l="l" t="t" r="r" b="b"/>
+                  <a:pathLst>
+                    <a:path w="175" h="173" extrusionOk="0">
+                      <a:moveTo>
+                        <a:pt x="24" y="0"/>
+                      </a:moveTo>
+                      <a:cubicBezTo>
+                        <a:pt x="9" y="26"/>
+                        <a:pt x="1" y="56"/>
+                        <a:pt x="1" y="86"/>
+                      </a:cubicBezTo>
+                      <a:cubicBezTo>
+                        <a:pt x="0" y="117"/>
+                        <a:pt x="9" y="147"/>
+                        <a:pt x="24" y="173"/>
+                      </a:cubicBezTo>
+                      <a:lnTo>
+                        <a:pt x="175" y="87"/>
+                      </a:lnTo>
+                      <a:lnTo>
+                        <a:pt x="24" y="0"/>
+                      </a:lnTo>
+                      <a:close/>
+                    </a:path>
+                  </a:pathLst>
+                </a:custGeom>
+                <a:solidFill>
+                  <a:schemeClr val="bg1"/>
+                </a:solidFill>
+                <a:ln w="28575" cap="flat" cmpd="sng">
+                  <a:solidFill>
+                    <a:schemeClr val="tx1"/>
+                  </a:solidFill>
+                  <a:prstDash val="solid"/>
+                  <a:round/>
+                  <a:headEnd type="none" w="sm" len="sm"/>
+                  <a:tailEnd type="none" w="sm" len="sm"/>
+                </a:ln>
+              </p:spPr>
+              <p:txBody>
+                <a:bodyPr spcFirstLastPara="1" wrap="square" lIns="68575" tIns="34275" rIns="68575" bIns="34275" anchor="ctr" anchorCtr="0">
+                  <a:noAutofit/>
+                </a:bodyPr>
+                <a:lstStyle/>
+                <a:p>
+                  <a:pPr marL="0" marR="0" lvl="0" indent="0" algn="l" rtl="0">
+                    <a:lnSpc>
+                      <a:spcPct val="100000"/>
+                    </a:lnSpc>
+                    <a:spcBef>
+                      <a:spcPts val="0"/>
+                    </a:spcBef>
+                    <a:spcAft>
+                      <a:spcPts val="0"/>
+                    </a:spcAft>
+                    <a:buClr>
+                      <a:srgbClr val="000000"/>
+                    </a:buClr>
+                    <a:buSzPts val="900"/>
+                    <a:buFont typeface="Arial"/>
+                    <a:buNone/>
+                  </a:pPr>
+                  <a:endParaRPr sz="900" b="0" i="0" u="none" strike="noStrike" cap="none">
+                    <a:solidFill>
+                      <a:schemeClr val="lt2"/>
+                    </a:solidFill>
+                    <a:latin typeface="Arial"/>
+                    <a:ea typeface="Arial"/>
+                    <a:cs typeface="Arial"/>
+                    <a:sym typeface="Arial"/>
+                  </a:endParaRPr>
+                </a:p>
+              </p:txBody>
+            </p:sp>
+            <p:sp>
+              <p:nvSpPr>
+                <p:cNvPr id="25" name="Google Shape;2592;p99">
+                  <a:extLst>
+                    <a:ext uri="{FF2B5EF4-FFF2-40B4-BE49-F238E27FC236}">
+                      <a16:creationId xmlns:a16="http://schemas.microsoft.com/office/drawing/2014/main" id="{1C769656-5143-1A12-3740-2B68BCC17CFC}"/>
+                    </a:ext>
+                  </a:extLst>
+                </p:cNvPr>
+                <p:cNvSpPr/>
+                <p:nvPr/>
+              </p:nvSpPr>
+              <p:spPr>
+                <a:xfrm>
+                  <a:off x="3603674" y="2410051"/>
+                  <a:ext cx="1695890" cy="1942562"/>
+                </a:xfrm>
+                <a:custGeom>
+                  <a:avLst/>
+                  <a:gdLst/>
+                  <a:ahLst/>
+                  <a:cxnLst/>
+                  <a:rect l="l" t="t" r="r" b="b"/>
+                  <a:pathLst>
+                    <a:path w="151" h="174" extrusionOk="0">
+                      <a:moveTo>
+                        <a:pt x="150" y="0"/>
+                      </a:moveTo>
+                      <a:cubicBezTo>
+                        <a:pt x="88" y="0"/>
+                        <a:pt x="31" y="33"/>
+                        <a:pt x="0" y="87"/>
+                      </a:cubicBezTo>
+                      <a:lnTo>
+                        <a:pt x="151" y="174"/>
+                      </a:lnTo>
+                      <a:lnTo>
+                        <a:pt x="150" y="0"/>
+                      </a:lnTo>
+                      <a:close/>
+                    </a:path>
+                  </a:pathLst>
+                </a:custGeom>
+                <a:solidFill>
+                  <a:schemeClr val="bg1"/>
+                </a:solidFill>
+                <a:ln w="28575" cap="flat" cmpd="sng">
+                  <a:solidFill>
+                    <a:schemeClr val="tx1"/>
+                  </a:solidFill>
+                  <a:prstDash val="solid"/>
+                  <a:round/>
+                  <a:headEnd type="none" w="sm" len="sm"/>
+                  <a:tailEnd type="none" w="sm" len="sm"/>
+                </a:ln>
+              </p:spPr>
+              <p:txBody>
+                <a:bodyPr spcFirstLastPara="1" wrap="square" lIns="68575" tIns="34275" rIns="68575" bIns="34275" anchor="ctr" anchorCtr="0">
+                  <a:noAutofit/>
+                </a:bodyPr>
+                <a:lstStyle/>
+                <a:p>
+                  <a:pPr marL="0" marR="0" lvl="0" indent="0" algn="l" rtl="0">
+                    <a:lnSpc>
+                      <a:spcPct val="100000"/>
+                    </a:lnSpc>
+                    <a:spcBef>
+                      <a:spcPts val="0"/>
+                    </a:spcBef>
+                    <a:spcAft>
+                      <a:spcPts val="0"/>
+                    </a:spcAft>
+                    <a:buClr>
+                      <a:srgbClr val="000000"/>
+                    </a:buClr>
+                    <a:buSzPts val="900"/>
+                    <a:buFont typeface="Arial"/>
+                    <a:buNone/>
+                  </a:pPr>
+                  <a:endParaRPr sz="900" b="0" i="0" u="none" strike="noStrike" cap="none" dirty="0">
+                    <a:solidFill>
+                      <a:schemeClr val="lt2"/>
+                    </a:solidFill>
+                    <a:latin typeface="Arial"/>
+                    <a:ea typeface="Arial"/>
+                    <a:cs typeface="Arial"/>
+                    <a:sym typeface="Arial"/>
+                  </a:endParaRPr>
+                </a:p>
+              </p:txBody>
+            </p:sp>
+          </p:grpSp>
+          <p:grpSp>
+            <p:nvGrpSpPr>
+              <p:cNvPr id="26" name="Google Shape;2594;p99">
+                <a:extLst>
+                  <a:ext uri="{FF2B5EF4-FFF2-40B4-BE49-F238E27FC236}">
+                    <a16:creationId xmlns:a16="http://schemas.microsoft.com/office/drawing/2014/main" id="{597EFC0F-A400-1CE2-AC49-96D341438916}"/>
+                  </a:ext>
+                </a:extLst>
+              </p:cNvPr>
+              <p:cNvGrpSpPr/>
+              <p:nvPr/>
+            </p:nvGrpSpPr>
+            <p:grpSpPr>
+              <a:xfrm>
+                <a:off x="734893" y="1509711"/>
+                <a:ext cx="2655979" cy="2655713"/>
+                <a:chOff x="3334516" y="2410051"/>
+                <a:chExt cx="3917951" cy="3872996"/>
+              </a:xfrm>
+            </p:grpSpPr>
+            <p:sp>
+              <p:nvSpPr>
+                <p:cNvPr id="27" name="Google Shape;2595;p99">
+                  <a:extLst>
+                    <a:ext uri="{FF2B5EF4-FFF2-40B4-BE49-F238E27FC236}">
+                      <a16:creationId xmlns:a16="http://schemas.microsoft.com/office/drawing/2014/main" id="{28364B88-F4FF-6FC5-7AE2-D2E7D8F9E264}"/>
+                    </a:ext>
+                  </a:extLst>
+                </p:cNvPr>
+                <p:cNvSpPr/>
+                <p:nvPr/>
+              </p:nvSpPr>
+              <p:spPr>
+                <a:xfrm>
+                  <a:off x="5299563" y="3380321"/>
+                  <a:ext cx="1952904" cy="1932455"/>
+                </a:xfrm>
+                <a:custGeom>
+                  <a:avLst/>
+                  <a:gdLst/>
+                  <a:ahLst/>
+                  <a:cxnLst/>
+                  <a:rect l="l" t="t" r="r" b="b"/>
+                  <a:pathLst>
+                    <a:path w="174" h="173" extrusionOk="0">
+                      <a:moveTo>
+                        <a:pt x="150" y="173"/>
+                      </a:moveTo>
+                      <a:cubicBezTo>
+                        <a:pt x="165" y="147"/>
+                        <a:pt x="174" y="117"/>
+                        <a:pt x="174" y="87"/>
+                      </a:cubicBezTo>
+                      <a:cubicBezTo>
+                        <a:pt x="174" y="56"/>
+                        <a:pt x="165" y="26"/>
+                        <a:pt x="150" y="0"/>
+                      </a:cubicBezTo>
+                      <a:lnTo>
+                        <a:pt x="0" y="87"/>
+                      </a:lnTo>
+                      <a:lnTo>
+                        <a:pt x="150" y="173"/>
+                      </a:lnTo>
+                      <a:close/>
+                    </a:path>
+                  </a:pathLst>
+                </a:custGeom>
+                <a:solidFill>
+                  <a:schemeClr val="lt2"/>
+                </a:solidFill>
+                <a:ln w="28575" cap="flat" cmpd="sng">
+                  <a:solidFill>
+                    <a:schemeClr val="lt1"/>
+                  </a:solidFill>
+                  <a:prstDash val="solid"/>
+                  <a:round/>
+                  <a:headEnd type="none" w="sm" len="sm"/>
+                  <a:tailEnd type="none" w="sm" len="sm"/>
+                </a:ln>
+              </p:spPr>
+              <p:txBody>
+                <a:bodyPr spcFirstLastPara="1" wrap="square" lIns="68575" tIns="34275" rIns="68575" bIns="34275" anchor="ctr" anchorCtr="0">
+                  <a:noAutofit/>
+                </a:bodyPr>
+                <a:lstStyle/>
+                <a:p>
+                  <a:pPr marL="0" marR="0" lvl="0" indent="0" algn="l" rtl="0">
+                    <a:lnSpc>
+                      <a:spcPct val="100000"/>
+                    </a:lnSpc>
+                    <a:spcBef>
+                      <a:spcPts val="0"/>
+                    </a:spcBef>
+                    <a:spcAft>
+                      <a:spcPts val="0"/>
+                    </a:spcAft>
+                    <a:buClr>
+                      <a:srgbClr val="000000"/>
+                    </a:buClr>
+                    <a:buSzPts val="900"/>
+                    <a:buFont typeface="Arial"/>
+                    <a:buNone/>
+                  </a:pPr>
+                  <a:endParaRPr sz="900" b="0" i="0" u="none" strike="noStrike" cap="none" dirty="0">
+                    <a:solidFill>
+                      <a:schemeClr val="lt2"/>
+                    </a:solidFill>
+                    <a:latin typeface="Arial"/>
+                    <a:ea typeface="Arial"/>
+                    <a:cs typeface="Arial"/>
+                    <a:sym typeface="Arial"/>
+                  </a:endParaRPr>
+                </a:p>
+              </p:txBody>
+            </p:sp>
+            <p:sp>
+              <p:nvSpPr>
+                <p:cNvPr id="28" name="Google Shape;2596;p99">
+                  <a:extLst>
+                    <a:ext uri="{FF2B5EF4-FFF2-40B4-BE49-F238E27FC236}">
+                      <a16:creationId xmlns:a16="http://schemas.microsoft.com/office/drawing/2014/main" id="{47272A59-23A7-90CB-92C9-5B089B1DE3A6}"/>
+                    </a:ext>
+                  </a:extLst>
+                </p:cNvPr>
+                <p:cNvSpPr/>
+                <p:nvPr/>
+              </p:nvSpPr>
+              <p:spPr>
+                <a:xfrm>
+                  <a:off x="5299563" y="2410051"/>
+                  <a:ext cx="1683748" cy="1942562"/>
+                </a:xfrm>
+                <a:custGeom>
+                  <a:avLst/>
+                  <a:gdLst/>
+                  <a:ahLst/>
+                  <a:cxnLst/>
+                  <a:rect l="l" t="t" r="r" b="b"/>
+                  <a:pathLst>
+                    <a:path w="150" h="174" extrusionOk="0">
+                      <a:moveTo>
+                        <a:pt x="150" y="87"/>
+                      </a:moveTo>
+                      <a:cubicBezTo>
+                        <a:pt x="119" y="33"/>
+                        <a:pt x="62" y="0"/>
+                        <a:pt x="0" y="0"/>
+                      </a:cubicBezTo>
+                      <a:lnTo>
+                        <a:pt x="0" y="174"/>
+                      </a:lnTo>
+                      <a:lnTo>
+                        <a:pt x="150" y="87"/>
+                      </a:lnTo>
+                      <a:close/>
+                    </a:path>
+                  </a:pathLst>
+                </a:custGeom>
+                <a:solidFill>
+                  <a:schemeClr val="lt2"/>
+                </a:solidFill>
+                <a:ln w="28575" cap="flat" cmpd="sng">
+                  <a:solidFill>
+                    <a:schemeClr val="lt1"/>
+                  </a:solidFill>
+                  <a:prstDash val="solid"/>
+                  <a:round/>
+                  <a:headEnd type="none" w="sm" len="sm"/>
+                  <a:tailEnd type="none" w="sm" len="sm"/>
+                </a:ln>
+              </p:spPr>
+              <p:txBody>
+                <a:bodyPr spcFirstLastPara="1" wrap="square" lIns="68575" tIns="34275" rIns="68575" bIns="34275" anchor="ctr" anchorCtr="0">
+                  <a:noAutofit/>
+                </a:bodyPr>
+                <a:lstStyle/>
+                <a:p>
+                  <a:pPr marL="0" marR="0" lvl="0" indent="0" algn="l" rtl="0">
+                    <a:lnSpc>
+                      <a:spcPct val="100000"/>
+                    </a:lnSpc>
+                    <a:spcBef>
+                      <a:spcPts val="0"/>
+                    </a:spcBef>
+                    <a:spcAft>
+                      <a:spcPts val="0"/>
+                    </a:spcAft>
+                    <a:buClr>
+                      <a:srgbClr val="000000"/>
+                    </a:buClr>
+                    <a:buSzPts val="900"/>
+                    <a:buFont typeface="Arial"/>
+                    <a:buNone/>
+                  </a:pPr>
+                  <a:endParaRPr sz="900" b="0" i="0" u="none" strike="noStrike" cap="none" dirty="0">
+                    <a:solidFill>
+                      <a:schemeClr val="lt2"/>
+                    </a:solidFill>
+                    <a:latin typeface="Arial"/>
+                    <a:ea typeface="Arial"/>
+                    <a:cs typeface="Arial"/>
+                    <a:sym typeface="Arial"/>
+                  </a:endParaRPr>
+                </a:p>
+              </p:txBody>
+            </p:sp>
+            <p:sp>
+              <p:nvSpPr>
+                <p:cNvPr id="29" name="Google Shape;2597;p99">
+                  <a:extLst>
+                    <a:ext uri="{FF2B5EF4-FFF2-40B4-BE49-F238E27FC236}">
+                      <a16:creationId xmlns:a16="http://schemas.microsoft.com/office/drawing/2014/main" id="{7A2565C3-B06F-BC12-2538-E0FA15BD8B91}"/>
+                    </a:ext>
+                  </a:extLst>
+                </p:cNvPr>
+                <p:cNvSpPr/>
+                <p:nvPr/>
+              </p:nvSpPr>
+              <p:spPr>
+                <a:xfrm>
+                  <a:off x="5299563" y="4352613"/>
+                  <a:ext cx="1683748" cy="1930434"/>
+                </a:xfrm>
+                <a:custGeom>
+                  <a:avLst/>
+                  <a:gdLst/>
+                  <a:ahLst/>
+                  <a:cxnLst/>
+                  <a:rect l="l" t="t" r="r" b="b"/>
+                  <a:pathLst>
+                    <a:path w="150" h="173" extrusionOk="0">
+                      <a:moveTo>
+                        <a:pt x="0" y="173"/>
+                      </a:moveTo>
+                      <a:cubicBezTo>
+                        <a:pt x="62" y="173"/>
+                        <a:pt x="119" y="140"/>
+                        <a:pt x="150" y="86"/>
+                      </a:cubicBezTo>
+                      <a:lnTo>
+                        <a:pt x="0" y="0"/>
+                      </a:lnTo>
+                      <a:lnTo>
+                        <a:pt x="0" y="173"/>
+                      </a:lnTo>
+                      <a:close/>
+                    </a:path>
+                  </a:pathLst>
+                </a:custGeom>
+                <a:solidFill>
+                  <a:schemeClr val="lt2"/>
+                </a:solidFill>
+                <a:ln w="28575" cap="flat" cmpd="sng">
+                  <a:solidFill>
+                    <a:schemeClr val="lt1"/>
+                  </a:solidFill>
+                  <a:prstDash val="solid"/>
+                  <a:round/>
+                  <a:headEnd type="none" w="sm" len="sm"/>
+                  <a:tailEnd type="none" w="sm" len="sm"/>
+                </a:ln>
+              </p:spPr>
+              <p:txBody>
+                <a:bodyPr spcFirstLastPara="1" wrap="square" lIns="68575" tIns="34275" rIns="68575" bIns="34275" anchor="ctr" anchorCtr="0">
+                  <a:noAutofit/>
+                </a:bodyPr>
+                <a:lstStyle/>
+                <a:p>
+                  <a:pPr marL="0" marR="0" lvl="0" indent="0" algn="l" rtl="0">
+                    <a:lnSpc>
+                      <a:spcPct val="100000"/>
+                    </a:lnSpc>
+                    <a:spcBef>
+                      <a:spcPts val="0"/>
+                    </a:spcBef>
+                    <a:spcAft>
+                      <a:spcPts val="0"/>
+                    </a:spcAft>
+                    <a:buClr>
+                      <a:srgbClr val="000000"/>
+                    </a:buClr>
+                    <a:buSzPts val="900"/>
+                    <a:buFont typeface="Arial"/>
+                    <a:buNone/>
+                  </a:pPr>
+                  <a:endParaRPr sz="900" b="0" i="0" u="none" strike="noStrike" cap="none">
+                    <a:solidFill>
+                      <a:schemeClr val="lt2"/>
+                    </a:solidFill>
+                    <a:latin typeface="Arial"/>
+                    <a:ea typeface="Arial"/>
+                    <a:cs typeface="Arial"/>
+                    <a:sym typeface="Arial"/>
+                  </a:endParaRPr>
+                </a:p>
+              </p:txBody>
+            </p:sp>
+            <p:sp>
+              <p:nvSpPr>
+                <p:cNvPr id="30" name="Google Shape;2598;p99">
+                  <a:extLst>
+                    <a:ext uri="{FF2B5EF4-FFF2-40B4-BE49-F238E27FC236}">
+                      <a16:creationId xmlns:a16="http://schemas.microsoft.com/office/drawing/2014/main" id="{D21B0E98-36EC-6004-BDA1-B70F9D405D8D}"/>
+                    </a:ext>
+                  </a:extLst>
+                </p:cNvPr>
+                <p:cNvSpPr/>
+                <p:nvPr/>
+              </p:nvSpPr>
+              <p:spPr>
+                <a:xfrm>
+                  <a:off x="3603673" y="4352613"/>
+                  <a:ext cx="1695890" cy="1930434"/>
+                </a:xfrm>
+                <a:custGeom>
+                  <a:avLst/>
+                  <a:gdLst/>
+                  <a:ahLst/>
+                  <a:cxnLst/>
+                  <a:rect l="l" t="t" r="r" b="b"/>
+                  <a:pathLst>
+                    <a:path w="151" h="173" extrusionOk="0">
+                      <a:moveTo>
+                        <a:pt x="0" y="86"/>
+                      </a:moveTo>
+                      <a:cubicBezTo>
+                        <a:pt x="31" y="140"/>
+                        <a:pt x="88" y="173"/>
+                        <a:pt x="151" y="173"/>
+                      </a:cubicBezTo>
+                      <a:lnTo>
+                        <a:pt x="151" y="0"/>
+                      </a:lnTo>
+                      <a:lnTo>
+                        <a:pt x="0" y="86"/>
+                      </a:lnTo>
+                      <a:close/>
+                    </a:path>
+                  </a:pathLst>
+                </a:custGeom>
+                <a:solidFill>
+                  <a:schemeClr val="lt2"/>
+                </a:solidFill>
+                <a:ln w="28575" cap="flat" cmpd="sng">
+                  <a:solidFill>
+                    <a:schemeClr val="lt1"/>
+                  </a:solidFill>
+                  <a:prstDash val="solid"/>
+                  <a:round/>
+                  <a:headEnd type="none" w="sm" len="sm"/>
+                  <a:tailEnd type="none" w="sm" len="sm"/>
+                </a:ln>
+              </p:spPr>
+              <p:txBody>
+                <a:bodyPr spcFirstLastPara="1" wrap="square" lIns="68575" tIns="34275" rIns="68575" bIns="34275" anchor="ctr" anchorCtr="0">
+                  <a:noAutofit/>
+                </a:bodyPr>
+                <a:lstStyle/>
+                <a:p>
+                  <a:pPr marL="0" marR="0" lvl="0" indent="0" algn="l" rtl="0">
+                    <a:lnSpc>
+                      <a:spcPct val="100000"/>
+                    </a:lnSpc>
+                    <a:spcBef>
+                      <a:spcPts val="0"/>
+                    </a:spcBef>
+                    <a:spcAft>
+                      <a:spcPts val="0"/>
+                    </a:spcAft>
+                    <a:buClr>
+                      <a:srgbClr val="000000"/>
+                    </a:buClr>
+                    <a:buSzPts val="900"/>
+                    <a:buFont typeface="Arial"/>
+                    <a:buNone/>
+                  </a:pPr>
+                  <a:endParaRPr sz="900" b="0" i="0" u="none" strike="noStrike" cap="none">
+                    <a:solidFill>
+                      <a:schemeClr val="lt2"/>
+                    </a:solidFill>
+                    <a:latin typeface="Arial"/>
+                    <a:ea typeface="Arial"/>
+                    <a:cs typeface="Arial"/>
+                    <a:sym typeface="Arial"/>
+                  </a:endParaRPr>
+                </a:p>
+              </p:txBody>
+            </p:sp>
+            <p:sp>
+              <p:nvSpPr>
+                <p:cNvPr id="31" name="Google Shape;2599;p99">
+                  <a:extLst>
+                    <a:ext uri="{FF2B5EF4-FFF2-40B4-BE49-F238E27FC236}">
+                      <a16:creationId xmlns:a16="http://schemas.microsoft.com/office/drawing/2014/main" id="{9F2FE20D-F86C-F055-44D1-92AB7A7010A1}"/>
+                    </a:ext>
+                  </a:extLst>
+                </p:cNvPr>
+                <p:cNvSpPr/>
+                <p:nvPr/>
+              </p:nvSpPr>
+              <p:spPr>
+                <a:xfrm>
+                  <a:off x="3334516" y="3380321"/>
+                  <a:ext cx="1965047" cy="1932455"/>
+                </a:xfrm>
+                <a:custGeom>
+                  <a:avLst/>
+                  <a:gdLst/>
+                  <a:ahLst/>
+                  <a:cxnLst/>
+                  <a:rect l="l" t="t" r="r" b="b"/>
+                  <a:pathLst>
+                    <a:path w="175" h="173" extrusionOk="0">
+                      <a:moveTo>
+                        <a:pt x="24" y="0"/>
+                      </a:moveTo>
+                      <a:cubicBezTo>
+                        <a:pt x="9" y="26"/>
+                        <a:pt x="1" y="56"/>
+                        <a:pt x="1" y="86"/>
+                      </a:cubicBezTo>
+                      <a:cubicBezTo>
+                        <a:pt x="0" y="117"/>
+                        <a:pt x="9" y="147"/>
+                        <a:pt x="24" y="173"/>
+                      </a:cubicBezTo>
+                      <a:lnTo>
+                        <a:pt x="175" y="87"/>
+                      </a:lnTo>
+                      <a:lnTo>
+                        <a:pt x="24" y="0"/>
+                      </a:lnTo>
+                      <a:close/>
+                    </a:path>
+                  </a:pathLst>
+                </a:custGeom>
+                <a:solidFill>
+                  <a:schemeClr val="lt2"/>
+                </a:solidFill>
+                <a:ln w="28575" cap="flat" cmpd="sng">
+                  <a:solidFill>
+                    <a:schemeClr val="lt1"/>
+                  </a:solidFill>
+                  <a:prstDash val="solid"/>
+                  <a:round/>
+                  <a:headEnd type="none" w="sm" len="sm"/>
+                  <a:tailEnd type="none" w="sm" len="sm"/>
+                </a:ln>
+              </p:spPr>
+              <p:txBody>
+                <a:bodyPr spcFirstLastPara="1" wrap="square" lIns="68575" tIns="34275" rIns="68575" bIns="34275" anchor="ctr" anchorCtr="0">
+                  <a:noAutofit/>
+                </a:bodyPr>
+                <a:lstStyle/>
+                <a:p>
+                  <a:pPr marL="0" marR="0" lvl="0" indent="0" algn="l" rtl="0">
+                    <a:lnSpc>
+                      <a:spcPct val="100000"/>
+                    </a:lnSpc>
+                    <a:spcBef>
+                      <a:spcPts val="0"/>
+                    </a:spcBef>
+                    <a:spcAft>
+                      <a:spcPts val="0"/>
+                    </a:spcAft>
+                    <a:buClr>
+                      <a:srgbClr val="000000"/>
+                    </a:buClr>
+                    <a:buSzPts val="900"/>
+                    <a:buFont typeface="Arial"/>
+                    <a:buNone/>
+                  </a:pPr>
+                  <a:endParaRPr sz="900" b="0" i="0" u="none" strike="noStrike" cap="none">
+                    <a:solidFill>
+                      <a:schemeClr val="lt2"/>
+                    </a:solidFill>
+                    <a:latin typeface="Arial"/>
+                    <a:ea typeface="Arial"/>
+                    <a:cs typeface="Arial"/>
+                    <a:sym typeface="Arial"/>
+                  </a:endParaRPr>
+                </a:p>
+              </p:txBody>
+            </p:sp>
+            <p:sp>
+              <p:nvSpPr>
+                <p:cNvPr id="32" name="Google Shape;2600;p99">
+                  <a:extLst>
+                    <a:ext uri="{FF2B5EF4-FFF2-40B4-BE49-F238E27FC236}">
+                      <a16:creationId xmlns:a16="http://schemas.microsoft.com/office/drawing/2014/main" id="{EE4325E4-C58A-7F41-8C1C-ABC1F3A2A7BC}"/>
+                    </a:ext>
+                  </a:extLst>
+                </p:cNvPr>
+                <p:cNvSpPr/>
+                <p:nvPr/>
+              </p:nvSpPr>
+              <p:spPr>
+                <a:xfrm>
+                  <a:off x="3603673" y="2410051"/>
+                  <a:ext cx="1695890" cy="1942562"/>
+                </a:xfrm>
+                <a:custGeom>
+                  <a:avLst/>
+                  <a:gdLst/>
+                  <a:ahLst/>
+                  <a:cxnLst/>
+                  <a:rect l="l" t="t" r="r" b="b"/>
+                  <a:pathLst>
+                    <a:path w="151" h="174" extrusionOk="0">
+                      <a:moveTo>
+                        <a:pt x="150" y="0"/>
+                      </a:moveTo>
+                      <a:cubicBezTo>
+                        <a:pt x="88" y="0"/>
+                        <a:pt x="31" y="33"/>
+                        <a:pt x="0" y="87"/>
+                      </a:cubicBezTo>
+                      <a:lnTo>
+                        <a:pt x="151" y="174"/>
+                      </a:lnTo>
+                      <a:lnTo>
+                        <a:pt x="150" y="0"/>
+                      </a:lnTo>
+                      <a:close/>
+                    </a:path>
+                  </a:pathLst>
+                </a:custGeom>
+                <a:solidFill>
+                  <a:schemeClr val="lt2"/>
+                </a:solidFill>
+                <a:ln w="28575" cap="flat" cmpd="sng">
+                  <a:solidFill>
+                    <a:schemeClr val="lt1"/>
+                  </a:solidFill>
+                  <a:prstDash val="solid"/>
+                  <a:round/>
+                  <a:headEnd type="none" w="sm" len="sm"/>
+                  <a:tailEnd type="none" w="sm" len="sm"/>
+                </a:ln>
+              </p:spPr>
+              <p:txBody>
+                <a:bodyPr spcFirstLastPara="1" wrap="square" lIns="68575" tIns="34275" rIns="68575" bIns="34275" anchor="ctr" anchorCtr="0">
+                  <a:noAutofit/>
+                </a:bodyPr>
+                <a:lstStyle/>
+                <a:p>
+                  <a:pPr marL="0" marR="0" lvl="0" indent="0" algn="l" rtl="0">
+                    <a:lnSpc>
+                      <a:spcPct val="100000"/>
+                    </a:lnSpc>
+                    <a:spcBef>
+                      <a:spcPts val="0"/>
+                    </a:spcBef>
+                    <a:spcAft>
+                      <a:spcPts val="0"/>
+                    </a:spcAft>
+                    <a:buClr>
+                      <a:srgbClr val="000000"/>
+                    </a:buClr>
+                    <a:buSzPts val="900"/>
+                    <a:buFont typeface="Arial"/>
+                    <a:buNone/>
+                  </a:pPr>
+                  <a:endParaRPr sz="900" b="0" i="0" u="none" strike="noStrike" cap="none" dirty="0">
+                    <a:solidFill>
+                      <a:schemeClr val="lt2"/>
+                    </a:solidFill>
+                    <a:latin typeface="Arial"/>
+                    <a:ea typeface="Arial"/>
+                    <a:cs typeface="Arial"/>
+                    <a:sym typeface="Arial"/>
+                  </a:endParaRPr>
+                </a:p>
+              </p:txBody>
+            </p:sp>
+          </p:grpSp>
+        </p:grpSp>
+        <p:sp>
+          <p:nvSpPr>
+            <p:cNvPr id="34" name="Oval 33">
+              <a:extLst>
+                <a:ext uri="{FF2B5EF4-FFF2-40B4-BE49-F238E27FC236}">
+                  <a16:creationId xmlns:a16="http://schemas.microsoft.com/office/drawing/2014/main" id="{F78984B0-97AE-DA04-BF0B-436A30472D00}"/>
+                </a:ext>
+              </a:extLst>
+            </p:cNvPr>
+            <p:cNvSpPr/>
+            <p:nvPr/>
+          </p:nvSpPr>
+          <p:spPr>
+            <a:xfrm>
+              <a:off x="4615478" y="1955769"/>
+              <a:ext cx="2961044" cy="2961044"/>
+            </a:xfrm>
+            <a:prstGeom prst="ellipse">
+              <a:avLst/>
+            </a:prstGeom>
+          </p:spPr>
+          <p:style>
+            <a:lnRef idx="2">
+              <a:schemeClr val="dk1"/>
+            </a:lnRef>
+            <a:fillRef idx="1">
+              <a:schemeClr val="lt1"/>
+            </a:fillRef>
+            <a:effectRef idx="0">
+              <a:schemeClr val="dk1"/>
+            </a:effectRef>
+            <a:fontRef idx="minor">
+              <a:schemeClr val="dk1"/>
+            </a:fontRef>
+          </p:style>
+          <p:txBody>
+            <a:bodyPr rtlCol="0" anchor="ctr"/>
+            <a:lstStyle/>
+            <a:p>
+              <a:pPr algn="ctr"/>
+              <a:r>
+                <a:rPr lang="en-US" sz="3200" dirty="0"/>
+                <a:t>Hash Value Range:</a:t>
+              </a:r>
+            </a:p>
+            <a:p>
+              <a:pPr algn="ctr"/>
+              <a:r>
+                <a:rPr lang="en-US" sz="3200" dirty="0"/>
+                <a:t>0 – 65535</a:t>
+              </a:r>
+            </a:p>
+          </p:txBody>
+        </p:sp>
+      </p:grpSp>
+      <p:sp>
+        <p:nvSpPr>
+          <p:cNvPr id="36" name="TextBox 35">
+            <a:extLst>
+              <a:ext uri="{FF2B5EF4-FFF2-40B4-BE49-F238E27FC236}">
+                <a16:creationId xmlns:a16="http://schemas.microsoft.com/office/drawing/2014/main" id="{5B3B1BE3-3272-CFBC-E7FC-ABFD147A694C}"/>
+              </a:ext>
+            </a:extLst>
+          </p:cNvPr>
+          <p:cNvSpPr txBox="1"/>
+          <p:nvPr/>
+        </p:nvSpPr>
+        <p:spPr>
+          <a:xfrm>
+            <a:off x="8640168" y="715265"/>
+            <a:ext cx="3277113" cy="707886"/>
+          </a:xfrm>
+          <a:prstGeom prst="rect">
+            <a:avLst/>
+          </a:prstGeom>
+          <a:noFill/>
+        </p:spPr>
+        <p:txBody>
+          <a:bodyPr wrap="square" rtlCol="0">
+            <a:spAutoFit/>
+          </a:bodyPr>
+          <a:lstStyle/>
+          <a:p>
+            <a:r>
+              <a:rPr lang="en-US" sz="2000" dirty="0"/>
+              <a:t>Physical Database Node: 1</a:t>
+            </a:r>
+          </a:p>
+          <a:p>
+            <a:r>
+              <a:rPr lang="en-US" sz="2000" dirty="0"/>
+              <a:t>Associated Virtual Nodes: 32</a:t>
+            </a:r>
+          </a:p>
+        </p:txBody>
+      </p:sp>
+      <p:cxnSp>
+        <p:nvCxnSpPr>
+          <p:cNvPr id="38" name="Straight Arrow Connector 37">
+            <a:extLst>
+              <a:ext uri="{FF2B5EF4-FFF2-40B4-BE49-F238E27FC236}">
+                <a16:creationId xmlns:a16="http://schemas.microsoft.com/office/drawing/2014/main" id="{CDF923E1-14EC-F49C-5575-6D3147A7464D}"/>
+              </a:ext>
+            </a:extLst>
+          </p:cNvPr>
+          <p:cNvCxnSpPr>
+            <a:cxnSpLocks/>
+            <a:endCxn id="36" idx="1"/>
+          </p:cNvCxnSpPr>
+          <p:nvPr/>
+        </p:nvCxnSpPr>
+        <p:spPr>
+          <a:xfrm>
+            <a:off x="7660746" y="1056743"/>
+            <a:ext cx="979422" cy="12465"/>
+          </a:xfrm>
+          <a:prstGeom prst="straightConnector1">
+            <a:avLst/>
+          </a:prstGeom>
+          <a:ln w="38100">
+            <a:tailEnd type="triangle"/>
+          </a:ln>
+        </p:spPr>
+        <p:style>
+          <a:lnRef idx="1">
+            <a:schemeClr val="accent1"/>
+          </a:lnRef>
+          <a:fillRef idx="0">
+            <a:schemeClr val="accent1"/>
+          </a:fillRef>
+          <a:effectRef idx="0">
+            <a:schemeClr val="accent1"/>
+          </a:effectRef>
+          <a:fontRef idx="minor">
+            <a:schemeClr val="tx1"/>
+          </a:fontRef>
+        </p:style>
+      </p:cxnSp>
+      <p:sp>
+        <p:nvSpPr>
+          <p:cNvPr id="2" name="Cylinder 1">
+            <a:extLst>
+              <a:ext uri="{FF2B5EF4-FFF2-40B4-BE49-F238E27FC236}">
+                <a16:creationId xmlns:a16="http://schemas.microsoft.com/office/drawing/2014/main" id="{B7CB3096-34FE-D1EF-C00F-E315CF0F4B8D}"/>
+              </a:ext>
+            </a:extLst>
+          </p:cNvPr>
+          <p:cNvSpPr/>
+          <p:nvPr/>
+        </p:nvSpPr>
+        <p:spPr>
+          <a:xfrm>
+            <a:off x="6974958" y="131328"/>
+            <a:ext cx="715010" cy="659765"/>
+          </a:xfrm>
+          <a:prstGeom prst="can">
+            <a:avLst/>
+          </a:prstGeom>
+          <a:ln>
+            <a:solidFill>
+              <a:schemeClr val="tx1"/>
+            </a:solidFill>
+          </a:ln>
+        </p:spPr>
+        <p:style>
+          <a:lnRef idx="2">
+            <a:schemeClr val="accent3">
+              <a:shade val="50000"/>
+            </a:schemeClr>
+          </a:lnRef>
+          <a:fillRef idx="1">
+            <a:schemeClr val="accent3"/>
+          </a:fillRef>
+          <a:effectRef idx="0">
+            <a:schemeClr val="accent3"/>
+          </a:effectRef>
+          <a:fontRef idx="minor">
+            <a:schemeClr val="lt1"/>
+          </a:fontRef>
+        </p:style>
+        <p:txBody>
+          <a:bodyPr rot="0" spcFirstLastPara="0" vert="horz" wrap="square" lIns="91440" tIns="45720" rIns="91440" bIns="45720" numCol="1" spcCol="0" rtlCol="0" fromWordArt="0" anchor="ctr" anchorCtr="0" forceAA="0" compatLnSpc="1">
+            <a:prstTxWarp prst="textNoShape">
+              <a:avLst/>
+            </a:prstTxWarp>
+            <a:noAutofit/>
+          </a:bodyPr>
+          <a:lstStyle/>
+          <a:p>
+            <a:pPr algn="ctr"/>
+            <a:r>
+              <a:rPr lang="en-US" dirty="0">
+                <a:solidFill>
+                  <a:schemeClr val="tx1"/>
+                </a:solidFill>
+              </a:rPr>
+              <a:t>D</a:t>
+            </a:r>
+            <a:r>
+              <a:rPr lang="en-US" baseline="-25000" dirty="0">
+                <a:solidFill>
+                  <a:schemeClr val="tx1"/>
+                </a:solidFill>
+              </a:rPr>
+              <a:t>3</a:t>
+            </a:r>
+          </a:p>
+        </p:txBody>
+      </p:sp>
+      <p:sp>
+        <p:nvSpPr>
+          <p:cNvPr id="3" name="Cylinder 2">
+            <a:extLst>
+              <a:ext uri="{FF2B5EF4-FFF2-40B4-BE49-F238E27FC236}">
+                <a16:creationId xmlns:a16="http://schemas.microsoft.com/office/drawing/2014/main" id="{3D7B49D1-388C-858A-C676-DCD0A0C476B5}"/>
+              </a:ext>
+            </a:extLst>
+          </p:cNvPr>
+          <p:cNvSpPr/>
+          <p:nvPr/>
+        </p:nvSpPr>
+        <p:spPr>
+          <a:xfrm>
+            <a:off x="8564807" y="1565540"/>
+            <a:ext cx="715010" cy="659765"/>
+          </a:xfrm>
+          <a:prstGeom prst="can">
+            <a:avLst/>
+          </a:prstGeom>
+          <a:ln>
+            <a:solidFill>
+              <a:schemeClr val="tx1"/>
+            </a:solidFill>
+          </a:ln>
+        </p:spPr>
+        <p:style>
+          <a:lnRef idx="2">
+            <a:schemeClr val="accent3">
+              <a:shade val="50000"/>
+            </a:schemeClr>
+          </a:lnRef>
+          <a:fillRef idx="1">
+            <a:schemeClr val="accent3"/>
+          </a:fillRef>
+          <a:effectRef idx="0">
+            <a:schemeClr val="accent3"/>
+          </a:effectRef>
+          <a:fontRef idx="minor">
+            <a:schemeClr val="lt1"/>
+          </a:fontRef>
+        </p:style>
+        <p:txBody>
+          <a:bodyPr rot="0" spcFirstLastPara="0" vert="horz" wrap="square" lIns="91440" tIns="45720" rIns="91440" bIns="45720" numCol="1" spcCol="0" rtlCol="0" fromWordArt="0" anchor="ctr" anchorCtr="0" forceAA="0" compatLnSpc="1">
+            <a:prstTxWarp prst="textNoShape">
+              <a:avLst/>
+            </a:prstTxWarp>
+            <a:noAutofit/>
+          </a:bodyPr>
+          <a:lstStyle/>
+          <a:p>
+            <a:pPr algn="ctr"/>
+            <a:r>
+              <a:rPr lang="en-US" dirty="0">
+                <a:solidFill>
+                  <a:schemeClr val="tx1"/>
+                </a:solidFill>
+              </a:rPr>
+              <a:t>D</a:t>
+            </a:r>
+            <a:r>
+              <a:rPr lang="en-US" baseline="-25000" dirty="0">
+                <a:solidFill>
+                  <a:schemeClr val="tx1"/>
+                </a:solidFill>
+              </a:rPr>
+              <a:t>3</a:t>
+            </a:r>
+          </a:p>
+        </p:txBody>
+      </p:sp>
+    </p:spTree>
+    <p:extLst>
+      <p:ext uri="{BB962C8B-B14F-4D97-AF65-F5344CB8AC3E}">
+        <p14:creationId xmlns:p14="http://schemas.microsoft.com/office/powerpoint/2010/main" val="777822940"/>
+      </p:ext>
+    </p:extLst>
+  </p:cSld>
+  <p:clrMapOvr>
+    <a:masterClrMapping/>
+  </p:clrMapOvr>
+</p:sld>
+</file>
+
+<file path=ppt/slides/slide3.xml><?xml version="1.0" encoding="utf-8"?>
+<p:sld xmlns:a="http://schemas.openxmlformats.org/drawingml/2006/main" xmlns:r="http://schemas.openxmlformats.org/officeDocument/2006/relationships" xmlns:p="http://schemas.openxmlformats.org/presentationml/2006/main">
+  <p:cSld>
+    <p:spTree>
+      <p:nvGrpSpPr>
+        <p:cNvPr id="1" name=""/>
+        <p:cNvGrpSpPr/>
+        <p:nvPr/>
+      </p:nvGrpSpPr>
+      <p:grpSpPr>
+        <a:xfrm>
+          <a:off x="0" y="0"/>
+          <a:ext cx="0" cy="0"/>
+          <a:chOff x="0" y="0"/>
+          <a:chExt cx="0" cy="0"/>
+        </a:xfrm>
+      </p:grpSpPr>
+      <p:sp>
+        <p:nvSpPr>
+          <p:cNvPr id="4" name="Oval 3">
+            <a:extLst>
+              <a:ext uri="{FF2B5EF4-FFF2-40B4-BE49-F238E27FC236}">
+                <a16:creationId xmlns:a16="http://schemas.microsoft.com/office/drawing/2014/main" id="{B96E64CD-670A-1D1E-B145-20F5AE3589F0}"/>
+              </a:ext>
+            </a:extLst>
+          </p:cNvPr>
+          <p:cNvSpPr/>
+          <p:nvPr/>
+        </p:nvSpPr>
+        <p:spPr>
+          <a:xfrm>
+            <a:off x="2896240" y="229240"/>
+            <a:ext cx="6399519" cy="6399519"/>
+          </a:xfrm>
+          <a:prstGeom prst="ellipse">
+            <a:avLst/>
+          </a:prstGeom>
+          <a:ln w="28575"/>
+        </p:spPr>
+        <p:style>
+          <a:lnRef idx="2">
+            <a:schemeClr val="dk1"/>
+          </a:lnRef>
+          <a:fillRef idx="1">
+            <a:schemeClr val="lt1"/>
+          </a:fillRef>
+          <a:effectRef idx="0">
+            <a:schemeClr val="dk1"/>
+          </a:effectRef>
+          <a:fontRef idx="minor">
+            <a:schemeClr val="dk1"/>
+          </a:fontRef>
+        </p:style>
+        <p:txBody>
+          <a:bodyPr rtlCol="0" anchor="ctr"/>
+          <a:lstStyle/>
+          <a:p>
+            <a:pPr algn="ctr"/>
+            <a:endParaRPr lang="en-US"/>
+          </a:p>
+        </p:txBody>
+      </p:sp>
+      <p:sp>
+        <p:nvSpPr>
+          <p:cNvPr id="6" name="Oval 5">
+            <a:extLst>
+              <a:ext uri="{FF2B5EF4-FFF2-40B4-BE49-F238E27FC236}">
+                <a16:creationId xmlns:a16="http://schemas.microsoft.com/office/drawing/2014/main" id="{CBA41DE3-609B-3BAC-5FDF-0F4A28679056}"/>
+              </a:ext>
+            </a:extLst>
+          </p:cNvPr>
+          <p:cNvSpPr/>
+          <p:nvPr/>
+        </p:nvSpPr>
+        <p:spPr>
+          <a:xfrm>
+            <a:off x="4615477" y="1948477"/>
+            <a:ext cx="2961044" cy="2961044"/>
+          </a:xfrm>
+          <a:prstGeom prst="ellipse">
+            <a:avLst/>
+          </a:prstGeom>
+        </p:spPr>
+        <p:style>
+          <a:lnRef idx="2">
+            <a:schemeClr val="dk1"/>
+          </a:lnRef>
+          <a:fillRef idx="1">
+            <a:schemeClr val="lt1"/>
+          </a:fillRef>
+          <a:effectRef idx="0">
+            <a:schemeClr val="dk1"/>
+          </a:effectRef>
+          <a:fontRef idx="minor">
+            <a:schemeClr val="dk1"/>
+          </a:fontRef>
+        </p:style>
+        <p:txBody>
+          <a:bodyPr rtlCol="0" anchor="ctr"/>
+          <a:lstStyle/>
+          <a:p>
+            <a:pPr algn="ctr"/>
+            <a:r>
+              <a:rPr lang="en-US" sz="3200" dirty="0"/>
+              <a:t>Hash Value Range:</a:t>
+            </a:r>
+          </a:p>
+          <a:p>
+            <a:pPr algn="ctr"/>
+            <a:r>
+              <a:rPr lang="en-US" sz="3200" dirty="0"/>
+              <a:t>0 – 65535</a:t>
+            </a:r>
+          </a:p>
+        </p:txBody>
+      </p:sp>
+      <p:sp>
+        <p:nvSpPr>
+          <p:cNvPr id="7" name="Cylinder 6">
+            <a:extLst>
+              <a:ext uri="{FF2B5EF4-FFF2-40B4-BE49-F238E27FC236}">
+                <a16:creationId xmlns:a16="http://schemas.microsoft.com/office/drawing/2014/main" id="{9C1C7CF4-A989-015C-FD96-1100FAF9610E}"/>
+              </a:ext>
+            </a:extLst>
+          </p:cNvPr>
+          <p:cNvSpPr/>
+          <p:nvPr/>
+        </p:nvSpPr>
+        <p:spPr>
+          <a:xfrm>
+            <a:off x="6974958" y="131328"/>
+            <a:ext cx="715010" cy="659765"/>
+          </a:xfrm>
+          <a:prstGeom prst="can">
+            <a:avLst/>
+          </a:prstGeom>
+          <a:ln>
+            <a:solidFill>
+              <a:schemeClr val="tx1"/>
+            </a:solidFill>
+          </a:ln>
+        </p:spPr>
+        <p:style>
+          <a:lnRef idx="2">
+            <a:schemeClr val="accent3">
+              <a:shade val="50000"/>
+            </a:schemeClr>
+          </a:lnRef>
+          <a:fillRef idx="1">
+            <a:schemeClr val="accent3"/>
+          </a:fillRef>
+          <a:effectRef idx="0">
+            <a:schemeClr val="accent3"/>
+          </a:effectRef>
+          <a:fontRef idx="minor">
+            <a:schemeClr val="lt1"/>
+          </a:fontRef>
+        </p:style>
+        <p:txBody>
+          <a:bodyPr rot="0" spcFirstLastPara="0" vert="horz" wrap="square" lIns="91440" tIns="45720" rIns="91440" bIns="45720" numCol="1" spcCol="0" rtlCol="0" fromWordArt="0" anchor="ctr" anchorCtr="0" forceAA="0" compatLnSpc="1">
+            <a:prstTxWarp prst="textNoShape">
+              <a:avLst/>
+            </a:prstTxWarp>
+            <a:noAutofit/>
+          </a:bodyPr>
+          <a:lstStyle/>
+          <a:p>
+            <a:pPr algn="ctr"/>
+            <a:r>
+              <a:rPr lang="en-US" dirty="0">
+                <a:solidFill>
+                  <a:schemeClr val="tx1"/>
+                </a:solidFill>
+              </a:rPr>
+              <a:t>D</a:t>
+            </a:r>
+            <a:r>
+              <a:rPr lang="en-US" baseline="-25000" dirty="0">
+                <a:solidFill>
+                  <a:schemeClr val="tx1"/>
+                </a:solidFill>
+              </a:rPr>
+              <a:t>3</a:t>
+            </a:r>
+          </a:p>
+        </p:txBody>
+      </p:sp>
+      <p:sp>
+        <p:nvSpPr>
+          <p:cNvPr id="8" name="Cylinder 7">
+            <a:extLst>
+              <a:ext uri="{FF2B5EF4-FFF2-40B4-BE49-F238E27FC236}">
+                <a16:creationId xmlns:a16="http://schemas.microsoft.com/office/drawing/2014/main" id="{46CF602A-7B49-394D-461E-989B64C24419}"/>
+              </a:ext>
+            </a:extLst>
+          </p:cNvPr>
+          <p:cNvSpPr/>
+          <p:nvPr/>
+        </p:nvSpPr>
+        <p:spPr>
+          <a:xfrm>
+            <a:off x="8564807" y="1565540"/>
+            <a:ext cx="715010" cy="659765"/>
+          </a:xfrm>
+          <a:prstGeom prst="can">
+            <a:avLst/>
+          </a:prstGeom>
+          <a:ln>
+            <a:solidFill>
+              <a:schemeClr val="tx1"/>
+            </a:solidFill>
+          </a:ln>
+        </p:spPr>
+        <p:style>
+          <a:lnRef idx="2">
+            <a:schemeClr val="accent3">
+              <a:shade val="50000"/>
+            </a:schemeClr>
+          </a:lnRef>
+          <a:fillRef idx="1">
+            <a:schemeClr val="accent3"/>
+          </a:fillRef>
+          <a:effectRef idx="0">
+            <a:schemeClr val="accent3"/>
+          </a:effectRef>
+          <a:fontRef idx="minor">
+            <a:schemeClr val="lt1"/>
+          </a:fontRef>
+        </p:style>
+        <p:txBody>
+          <a:bodyPr rot="0" spcFirstLastPara="0" vert="horz" wrap="square" lIns="91440" tIns="45720" rIns="91440" bIns="45720" numCol="1" spcCol="0" rtlCol="0" fromWordArt="0" anchor="ctr" anchorCtr="0" forceAA="0" compatLnSpc="1">
+            <a:prstTxWarp prst="textNoShape">
+              <a:avLst/>
+            </a:prstTxWarp>
+            <a:noAutofit/>
+          </a:bodyPr>
+          <a:lstStyle/>
+          <a:p>
+            <a:pPr algn="ctr"/>
+            <a:r>
+              <a:rPr lang="en-US" dirty="0">
+                <a:solidFill>
+                  <a:schemeClr val="tx1"/>
+                </a:solidFill>
+              </a:rPr>
+              <a:t>D</a:t>
+            </a:r>
+            <a:r>
+              <a:rPr lang="en-US" baseline="-25000" dirty="0">
+                <a:solidFill>
+                  <a:schemeClr val="tx1"/>
+                </a:solidFill>
+              </a:rPr>
+              <a:t>3</a:t>
+            </a:r>
+          </a:p>
+        </p:txBody>
+      </p:sp>
+      <p:pic>
+        <p:nvPicPr>
+          <p:cNvPr id="11" name="Picture 10">
+            <a:extLst>
+              <a:ext uri="{FF2B5EF4-FFF2-40B4-BE49-F238E27FC236}">
+                <a16:creationId xmlns:a16="http://schemas.microsoft.com/office/drawing/2014/main" id="{8F197096-75D5-F3FE-DC5E-E47DEA206798}"/>
+              </a:ext>
+            </a:extLst>
+          </p:cNvPr>
+          <p:cNvPicPr>
+            <a:picLocks noChangeAspect="1"/>
+          </p:cNvPicPr>
+          <p:nvPr/>
+        </p:nvPicPr>
+        <p:blipFill>
+          <a:blip r:embed="rId2"/>
+          <a:stretch>
+            <a:fillRect/>
+          </a:stretch>
+        </p:blipFill>
+        <p:spPr>
+          <a:xfrm>
+            <a:off x="1" y="1"/>
+            <a:ext cx="3741570" cy="3019926"/>
+          </a:xfrm>
+          <a:prstGeom prst="rect">
+            <a:avLst/>
+          </a:prstGeom>
+        </p:spPr>
+      </p:pic>
+    </p:spTree>
+    <p:extLst>
+      <p:ext uri="{BB962C8B-B14F-4D97-AF65-F5344CB8AC3E}">
+        <p14:creationId xmlns:p14="http://schemas.microsoft.com/office/powerpoint/2010/main" val="1978264700"/>
+      </p:ext>
+    </p:extLst>
+  </p:cSld>
+  <p:clrMapOvr>
+    <a:masterClrMapping/>
+  </p:clrMapOvr>
+</p:sld>
+</file>
+
 <file path=ppt/theme/theme1.xml><?xml version="1.0" encoding="utf-8"?>
 <a:theme xmlns:a="http://schemas.openxmlformats.org/drawingml/2006/main" name="Office Theme">
   <a:themeElements>
